--- a/dist/초6/수학/입체와측정/초6_수학_입체와측정_03_쌓기나무와공간감각_학생용.pptx
+++ b/dist/초6/수학/입체와측정/초6_수학_입체와측정_03_쌓기나무와공간감각_학생용.pptx
@@ -120,13 +120,13 @@
   <p:extLst>
     <p:ext uri="{521415D9-36F7-43E2-AB2F-B90AF26B5E84}">
       <p14:sectionLst xmlns:p14="http://schemas.microsoft.com/office/powerpoint/2010/main">
-        <p14:section name="도입" id="{e7a731b8-5e9e-71eb-2548-673c10f8abc6}">
+        <p14:section name="도입" id="{b28a14e1-1a60-4096-ed7d-a2b26f8f1587}">
           <p14:sldIdLst>
             <p14:sldId id="256"/>
             <p14:sldId id="257"/>
           </p14:sldIdLst>
         </p14:section>
-        <p14:section name="개념" id="{cc23c482-d3d4-0d77-23b4-20aa3c61d6b1}">
+        <p14:section name="개념" id="{67dd32d6-ffc1-94a7-956d-1a9b76d64efd}">
           <p14:sldIdLst>
             <p14:sldId id="258"/>
             <p14:sldId id="260"/>
@@ -134,7 +134,7 @@
             <p14:sldId id="262"/>
           </p14:sldIdLst>
         </p14:section>
-        <p14:section name="연습" id="{e4f3d31c-bed2-23e1-ab91-f073444e2a23}">
+        <p14:section name="연습" id="{c1c5dbb7-27c8-2660-7044-dc2317b581de}">
           <p14:sldIdLst>
             <p14:sldId id="259"/>
             <p14:sldId id="263"/>
@@ -142,24 +142,24 @@
             <p14:sldId id="265"/>
           </p14:sldIdLst>
         </p14:section>
-        <p14:section name="개념" id="{c5f47efa-8409-3b72-5d21-9fd9e4f1329d}">
+        <p14:section name="개념" id="{65d55a71-c0a8-379e-3570-e8dc9def4836}">
           <p14:sldIdLst/>
         </p14:section>
-        <p14:section name="연습" id="{660293b8-7189-f6aa-681f-3e637cdc53ba}">
+        <p14:section name="연습" id="{3232f980-0d63-9c92-3548-8a656b791cc7}">
           <p14:sldIdLst/>
         </p14:section>
-        <p14:section name="확인" id="{dac9d201-dbfd-d2c4-223d-ebc7fbda6914}">
+        <p14:section name="확인" id="{822ad72c-4cbe-c755-6381-47b76e3e9b65}">
           <p14:sldIdLst>
             <p14:sldId id="266"/>
             <p14:sldId id="267"/>
           </p14:sldIdLst>
         </p14:section>
-        <p14:section name="정리" id="{759c9744-a6fb-c6fe-6645-be351d18e5fc}">
+        <p14:section name="정리" id="{78c8effb-b9e9-252f-486c-9a2dffb95f7a}">
           <p14:sldIdLst>
             <p14:sldId id="268"/>
           </p14:sldIdLst>
         </p14:section>
-        <p14:section name="보충" id="{0cd43c9d-4aa0-bddb-7215-f9e0e645ba03}">
+        <p14:section name="보충" id="{cb85db01-fd16-b44f-47c1-5563817525b7}">
           <p14:sldIdLst>
             <p14:sldId id="269"/>
           </p14:sldIdLst>
